--- a/Changes.pptx
+++ b/Changes.pptx
@@ -13,6 +13,8 @@
     <p:sldId id="260" r:id="rId7"/>
     <p:sldId id="261" r:id="rId8"/>
     <p:sldId id="262" r:id="rId9"/>
+    <p:sldId id="264" r:id="rId10"/>
+    <p:sldId id="265" r:id="rId11"/>
   </p:sldIdLst>
   <p:sldSz cx="12192000" cy="6858000"/>
   <p:notesSz cx="6858000" cy="9144000"/>
@@ -266,7 +268,7 @@
           <a:p>
             <a:fld id="{1DD4E00F-F08F-42B3-9EE0-04152C097CB2}" type="datetimeFigureOut">
               <a:rPr lang="en-US" smtClean="0"/>
-              <a:t>3/17/2026</a:t>
+              <a:t>3/25/2026</a:t>
             </a:fld>
             <a:endParaRPr lang="en-US"/>
           </a:p>
@@ -464,7 +466,7 @@
           <a:p>
             <a:fld id="{1DD4E00F-F08F-42B3-9EE0-04152C097CB2}" type="datetimeFigureOut">
               <a:rPr lang="en-US" smtClean="0"/>
-              <a:t>3/17/2026</a:t>
+              <a:t>3/25/2026</a:t>
             </a:fld>
             <a:endParaRPr lang="en-US"/>
           </a:p>
@@ -672,7 +674,7 @@
           <a:p>
             <a:fld id="{1DD4E00F-F08F-42B3-9EE0-04152C097CB2}" type="datetimeFigureOut">
               <a:rPr lang="en-US" smtClean="0"/>
-              <a:t>3/17/2026</a:t>
+              <a:t>3/25/2026</a:t>
             </a:fld>
             <a:endParaRPr lang="en-US"/>
           </a:p>
@@ -870,7 +872,7 @@
           <a:p>
             <a:fld id="{1DD4E00F-F08F-42B3-9EE0-04152C097CB2}" type="datetimeFigureOut">
               <a:rPr lang="en-US" smtClean="0"/>
-              <a:t>3/17/2026</a:t>
+              <a:t>3/25/2026</a:t>
             </a:fld>
             <a:endParaRPr lang="en-US"/>
           </a:p>
@@ -1145,7 +1147,7 @@
           <a:p>
             <a:fld id="{1DD4E00F-F08F-42B3-9EE0-04152C097CB2}" type="datetimeFigureOut">
               <a:rPr lang="en-US" smtClean="0"/>
-              <a:t>3/17/2026</a:t>
+              <a:t>3/25/2026</a:t>
             </a:fld>
             <a:endParaRPr lang="en-US"/>
           </a:p>
@@ -1410,7 +1412,7 @@
           <a:p>
             <a:fld id="{1DD4E00F-F08F-42B3-9EE0-04152C097CB2}" type="datetimeFigureOut">
               <a:rPr lang="en-US" smtClean="0"/>
-              <a:t>3/17/2026</a:t>
+              <a:t>3/25/2026</a:t>
             </a:fld>
             <a:endParaRPr lang="en-US"/>
           </a:p>
@@ -1822,7 +1824,7 @@
           <a:p>
             <a:fld id="{1DD4E00F-F08F-42B3-9EE0-04152C097CB2}" type="datetimeFigureOut">
               <a:rPr lang="en-US" smtClean="0"/>
-              <a:t>3/17/2026</a:t>
+              <a:t>3/25/2026</a:t>
             </a:fld>
             <a:endParaRPr lang="en-US"/>
           </a:p>
@@ -1963,7 +1965,7 @@
           <a:p>
             <a:fld id="{1DD4E00F-F08F-42B3-9EE0-04152C097CB2}" type="datetimeFigureOut">
               <a:rPr lang="en-US" smtClean="0"/>
-              <a:t>3/17/2026</a:t>
+              <a:t>3/25/2026</a:t>
             </a:fld>
             <a:endParaRPr lang="en-US"/>
           </a:p>
@@ -2076,7 +2078,7 @@
           <a:p>
             <a:fld id="{1DD4E00F-F08F-42B3-9EE0-04152C097CB2}" type="datetimeFigureOut">
               <a:rPr lang="en-US" smtClean="0"/>
-              <a:t>3/17/2026</a:t>
+              <a:t>3/25/2026</a:t>
             </a:fld>
             <a:endParaRPr lang="en-US"/>
           </a:p>
@@ -2387,7 +2389,7 @@
           <a:p>
             <a:fld id="{1DD4E00F-F08F-42B3-9EE0-04152C097CB2}" type="datetimeFigureOut">
               <a:rPr lang="en-US" smtClean="0"/>
-              <a:t>3/17/2026</a:t>
+              <a:t>3/25/2026</a:t>
             </a:fld>
             <a:endParaRPr lang="en-US"/>
           </a:p>
@@ -2675,7 +2677,7 @@
           <a:p>
             <a:fld id="{1DD4E00F-F08F-42B3-9EE0-04152C097CB2}" type="datetimeFigureOut">
               <a:rPr lang="en-US" smtClean="0"/>
-              <a:t>3/17/2026</a:t>
+              <a:t>3/25/2026</a:t>
             </a:fld>
             <a:endParaRPr lang="en-US"/>
           </a:p>
@@ -2916,7 +2918,7 @@
           <a:p>
             <a:fld id="{1DD4E00F-F08F-42B3-9EE0-04152C097CB2}" type="datetimeFigureOut">
               <a:rPr lang="en-US" smtClean="0"/>
-              <a:t>3/17/2026</a:t>
+              <a:t>3/25/2026</a:t>
             </a:fld>
             <a:endParaRPr lang="en-US"/>
           </a:p>
@@ -3778,6 +3780,234 @@
 </p:sld>
 </file>
 
+<file path=ppt/slides/slide10.xml><?xml version="1.0" encoding="utf-8"?>
+<p:sld xmlns:a="http://schemas.openxmlformats.org/drawingml/2006/main" xmlns:r="http://schemas.openxmlformats.org/officeDocument/2006/relationships" xmlns:p="http://schemas.openxmlformats.org/presentationml/2006/main">
+  <p:cSld>
+    <p:spTree>
+      <p:nvGrpSpPr>
+        <p:cNvPr id="1" name=""/>
+        <p:cNvGrpSpPr/>
+        <p:nvPr/>
+      </p:nvGrpSpPr>
+      <p:grpSpPr>
+        <a:xfrm>
+          <a:off x="0" y="0"/>
+          <a:ext cx="0" cy="0"/>
+          <a:chOff x="0" y="0"/>
+          <a:chExt cx="0" cy="0"/>
+        </a:xfrm>
+      </p:grpSpPr>
+      <p:pic>
+        <p:nvPicPr>
+          <p:cNvPr id="5" name="Picture 4">
+            <a:extLst>
+              <a:ext uri="{FF2B5EF4-FFF2-40B4-BE49-F238E27FC236}">
+                <a16:creationId xmlns:a16="http://schemas.microsoft.com/office/drawing/2014/main" id="{25277A54-B46A-F155-70D2-60B4CD24D761}"/>
+              </a:ext>
+            </a:extLst>
+          </p:cNvPr>
+          <p:cNvPicPr>
+            <a:picLocks noChangeAspect="1"/>
+          </p:cNvPicPr>
+          <p:nvPr/>
+        </p:nvPicPr>
+        <p:blipFill>
+          <a:blip r:embed="rId2"/>
+          <a:stretch>
+            <a:fillRect/>
+          </a:stretch>
+        </p:blipFill>
+        <p:spPr>
+          <a:xfrm>
+            <a:off x="486129" y="1698424"/>
+            <a:ext cx="8934523" cy="4202843"/>
+          </a:xfrm>
+          <a:prstGeom prst="rect">
+            <a:avLst/>
+          </a:prstGeom>
+        </p:spPr>
+      </p:pic>
+      <p:sp>
+        <p:nvSpPr>
+          <p:cNvPr id="6" name="TextBox 5">
+            <a:extLst>
+              <a:ext uri="{FF2B5EF4-FFF2-40B4-BE49-F238E27FC236}">
+                <a16:creationId xmlns:a16="http://schemas.microsoft.com/office/drawing/2014/main" id="{85C91C72-557C-CA95-BAF1-832A6C258B4C}"/>
+              </a:ext>
+            </a:extLst>
+          </p:cNvPr>
+          <p:cNvSpPr txBox="1"/>
+          <p:nvPr/>
+        </p:nvSpPr>
+        <p:spPr>
+          <a:xfrm>
+            <a:off x="10062562" y="2216146"/>
+            <a:ext cx="1643309" cy="646331"/>
+          </a:xfrm>
+          <a:prstGeom prst="rect">
+            <a:avLst/>
+          </a:prstGeom>
+          <a:noFill/>
+        </p:spPr>
+        <p:txBody>
+          <a:bodyPr wrap="square" rtlCol="0">
+            <a:spAutoFit/>
+          </a:bodyPr>
+          <a:lstStyle/>
+          <a:p>
+            <a:r>
+              <a:rPr lang="en-US" sz="1200" dirty="0"/>
+              <a:t>7 reduce this room.  And move bathroom to the back</a:t>
+            </a:r>
+          </a:p>
+        </p:txBody>
+      </p:sp>
+      <p:cxnSp>
+        <p:nvCxnSpPr>
+          <p:cNvPr id="7" name="Straight Arrow Connector 6">
+            <a:extLst>
+              <a:ext uri="{FF2B5EF4-FFF2-40B4-BE49-F238E27FC236}">
+                <a16:creationId xmlns:a16="http://schemas.microsoft.com/office/drawing/2014/main" id="{EDF91694-8101-607D-DB48-71D2AACC84E8}"/>
+              </a:ext>
+            </a:extLst>
+          </p:cNvPr>
+          <p:cNvCxnSpPr>
+            <a:cxnSpLocks/>
+            <a:stCxn id="6" idx="1"/>
+          </p:cNvCxnSpPr>
+          <p:nvPr/>
+        </p:nvCxnSpPr>
+        <p:spPr>
+          <a:xfrm flipH="1">
+            <a:off x="8995833" y="2539312"/>
+            <a:ext cx="1066729" cy="474821"/>
+          </a:xfrm>
+          <a:prstGeom prst="straightConnector1">
+            <a:avLst/>
+          </a:prstGeom>
+          <a:ln>
+            <a:solidFill>
+              <a:srgbClr val="FF0000"/>
+            </a:solidFill>
+            <a:tailEnd type="triangle"/>
+          </a:ln>
+        </p:spPr>
+        <p:style>
+          <a:lnRef idx="2">
+            <a:schemeClr val="accent1"/>
+          </a:lnRef>
+          <a:fillRef idx="0">
+            <a:schemeClr val="accent1"/>
+          </a:fillRef>
+          <a:effectRef idx="1">
+            <a:schemeClr val="accent1"/>
+          </a:effectRef>
+          <a:fontRef idx="minor">
+            <a:schemeClr val="tx1"/>
+          </a:fontRef>
+        </p:style>
+      </p:cxnSp>
+      <p:sp>
+        <p:nvSpPr>
+          <p:cNvPr id="11" name="TextBox 10">
+            <a:extLst>
+              <a:ext uri="{FF2B5EF4-FFF2-40B4-BE49-F238E27FC236}">
+                <a16:creationId xmlns:a16="http://schemas.microsoft.com/office/drawing/2014/main" id="{D7E4AEF5-8CC6-49AE-9582-C66D6957DEBE}"/>
+              </a:ext>
+            </a:extLst>
+          </p:cNvPr>
+          <p:cNvSpPr txBox="1"/>
+          <p:nvPr/>
+        </p:nvSpPr>
+        <p:spPr>
+          <a:xfrm>
+            <a:off x="9842429" y="4671479"/>
+            <a:ext cx="1643309" cy="276999"/>
+          </a:xfrm>
+          <a:prstGeom prst="rect">
+            <a:avLst/>
+          </a:prstGeom>
+          <a:noFill/>
+        </p:spPr>
+        <p:txBody>
+          <a:bodyPr wrap="square" rtlCol="0">
+            <a:spAutoFit/>
+          </a:bodyPr>
+          <a:lstStyle/>
+          <a:p>
+            <a:r>
+              <a:rPr lang="en-US" sz="1200" dirty="0"/>
+              <a:t>8. </a:t>
+            </a:r>
+            <a:r>
+              <a:rPr lang="en-US" sz="1200" dirty="0" err="1"/>
+              <a:t>Halfbathroom</a:t>
+            </a:r>
+            <a:r>
+              <a:rPr lang="en-US" sz="1200" dirty="0"/>
+              <a:t> here</a:t>
+            </a:r>
+          </a:p>
+        </p:txBody>
+      </p:sp>
+      <p:cxnSp>
+        <p:nvCxnSpPr>
+          <p:cNvPr id="12" name="Straight Arrow Connector 11">
+            <a:extLst>
+              <a:ext uri="{FF2B5EF4-FFF2-40B4-BE49-F238E27FC236}">
+                <a16:creationId xmlns:a16="http://schemas.microsoft.com/office/drawing/2014/main" id="{2A469852-3E03-B249-C439-8E6C4669BED5}"/>
+              </a:ext>
+            </a:extLst>
+          </p:cNvPr>
+          <p:cNvCxnSpPr>
+            <a:cxnSpLocks/>
+            <a:stCxn id="11" idx="1"/>
+          </p:cNvCxnSpPr>
+          <p:nvPr/>
+        </p:nvCxnSpPr>
+        <p:spPr>
+          <a:xfrm flipH="1">
+            <a:off x="8775700" y="4809979"/>
+            <a:ext cx="1066729" cy="659487"/>
+          </a:xfrm>
+          <a:prstGeom prst="straightConnector1">
+            <a:avLst/>
+          </a:prstGeom>
+          <a:ln>
+            <a:solidFill>
+              <a:srgbClr val="FF0000"/>
+            </a:solidFill>
+            <a:tailEnd type="triangle"/>
+          </a:ln>
+        </p:spPr>
+        <p:style>
+          <a:lnRef idx="2">
+            <a:schemeClr val="accent1"/>
+          </a:lnRef>
+          <a:fillRef idx="0">
+            <a:schemeClr val="accent1"/>
+          </a:fillRef>
+          <a:effectRef idx="1">
+            <a:schemeClr val="accent1"/>
+          </a:effectRef>
+          <a:fontRef idx="minor">
+            <a:schemeClr val="tx1"/>
+          </a:fontRef>
+        </p:style>
+      </p:cxnSp>
+    </p:spTree>
+    <p:extLst>
+      <p:ext uri="{BB962C8B-B14F-4D97-AF65-F5344CB8AC3E}">
+        <p14:creationId xmlns:p14="http://schemas.microsoft.com/office/powerpoint/2010/main" val="1262163114"/>
+      </p:ext>
+    </p:extLst>
+  </p:cSld>
+  <p:clrMapOvr>
+    <a:masterClrMapping/>
+  </p:clrMapOvr>
+</p:sld>
+</file>
+
 <file path=ppt/slides/slide2.xml><?xml version="1.0" encoding="utf-8"?>
 <p:sld xmlns:a="http://schemas.openxmlformats.org/drawingml/2006/main" xmlns:r="http://schemas.openxmlformats.org/officeDocument/2006/relationships" xmlns:p="http://schemas.openxmlformats.org/presentationml/2006/main">
   <p:cSld>
@@ -6263,7 +6493,7 @@
         </p:blipFill>
         <p:spPr>
           <a:xfrm>
-            <a:off x="4703180" y="-674409"/>
+            <a:off x="7893917" y="773391"/>
             <a:ext cx="2908921" cy="6858000"/>
           </a:xfrm>
           <a:prstGeom prst="rect">
@@ -6625,6 +6855,1950 @@
     <p:extLst>
       <p:ext uri="{BB962C8B-B14F-4D97-AF65-F5344CB8AC3E}">
         <p14:creationId xmlns:p14="http://schemas.microsoft.com/office/powerpoint/2010/main" val="3154494321"/>
+      </p:ext>
+    </p:extLst>
+  </p:cSld>
+  <p:clrMapOvr>
+    <a:masterClrMapping/>
+  </p:clrMapOvr>
+</p:sld>
+</file>
+
+<file path=ppt/slides/slide9.xml><?xml version="1.0" encoding="utf-8"?>
+<p:sld xmlns:a="http://schemas.openxmlformats.org/drawingml/2006/main" xmlns:r="http://schemas.openxmlformats.org/officeDocument/2006/relationships" xmlns:p="http://schemas.openxmlformats.org/presentationml/2006/main">
+  <p:cSld>
+    <p:spTree>
+      <p:nvGrpSpPr>
+        <p:cNvPr id="1" name=""/>
+        <p:cNvGrpSpPr/>
+        <p:nvPr/>
+      </p:nvGrpSpPr>
+      <p:grpSpPr>
+        <a:xfrm>
+          <a:off x="0" y="0"/>
+          <a:ext cx="0" cy="0"/>
+          <a:chOff x="0" y="0"/>
+          <a:chExt cx="0" cy="0"/>
+        </a:xfrm>
+      </p:grpSpPr>
+      <p:pic>
+        <p:nvPicPr>
+          <p:cNvPr id="42" name="Picture 41">
+            <a:extLst>
+              <a:ext uri="{FF2B5EF4-FFF2-40B4-BE49-F238E27FC236}">
+                <a16:creationId xmlns:a16="http://schemas.microsoft.com/office/drawing/2014/main" id="{1C070F58-9B83-47D6-CAAE-7935107F8088}"/>
+              </a:ext>
+            </a:extLst>
+          </p:cNvPr>
+          <p:cNvPicPr>
+            <a:picLocks noChangeAspect="1"/>
+          </p:cNvPicPr>
+          <p:nvPr/>
+        </p:nvPicPr>
+        <p:blipFill>
+          <a:blip r:embed="rId2"/>
+          <a:stretch>
+            <a:fillRect/>
+          </a:stretch>
+        </p:blipFill>
+        <p:spPr>
+          <a:xfrm>
+            <a:off x="7226057" y="6600"/>
+            <a:ext cx="4932606" cy="7410450"/>
+          </a:xfrm>
+          <a:prstGeom prst="rect">
+            <a:avLst/>
+          </a:prstGeom>
+        </p:spPr>
+      </p:pic>
+      <p:pic>
+        <p:nvPicPr>
+          <p:cNvPr id="103" name="Picture 102">
+            <a:extLst>
+              <a:ext uri="{FF2B5EF4-FFF2-40B4-BE49-F238E27FC236}">
+                <a16:creationId xmlns:a16="http://schemas.microsoft.com/office/drawing/2014/main" id="{C7240A5A-3143-3D98-4A7E-DFF8131C3A82}"/>
+              </a:ext>
+            </a:extLst>
+          </p:cNvPr>
+          <p:cNvPicPr>
+            <a:picLocks noChangeAspect="1"/>
+          </p:cNvPicPr>
+          <p:nvPr/>
+        </p:nvPicPr>
+        <p:blipFill>
+          <a:blip r:embed="rId3">
+            <a:alphaModFix amt="50000"/>
+          </a:blip>
+          <a:stretch>
+            <a:fillRect/>
+          </a:stretch>
+        </p:blipFill>
+        <p:spPr>
+          <a:xfrm>
+            <a:off x="9434444" y="4423834"/>
+            <a:ext cx="2117934" cy="2637115"/>
+          </a:xfrm>
+          <a:prstGeom prst="rect">
+            <a:avLst/>
+          </a:prstGeom>
+        </p:spPr>
+      </p:pic>
+      <p:pic>
+        <p:nvPicPr>
+          <p:cNvPr id="16" name="Picture 15">
+            <a:extLst>
+              <a:ext uri="{FF2B5EF4-FFF2-40B4-BE49-F238E27FC236}">
+                <a16:creationId xmlns:a16="http://schemas.microsoft.com/office/drawing/2014/main" id="{A282FC66-3EF2-2B90-9969-D516C2C60C95}"/>
+              </a:ext>
+            </a:extLst>
+          </p:cNvPr>
+          <p:cNvPicPr>
+            <a:picLocks noChangeAspect="1"/>
+          </p:cNvPicPr>
+          <p:nvPr/>
+        </p:nvPicPr>
+        <p:blipFill>
+          <a:blip r:embed="rId2"/>
+          <a:stretch>
+            <a:fillRect/>
+          </a:stretch>
+        </p:blipFill>
+        <p:spPr>
+          <a:xfrm>
+            <a:off x="33339" y="0"/>
+            <a:ext cx="4932606" cy="7410450"/>
+          </a:xfrm>
+          <a:prstGeom prst="rect">
+            <a:avLst/>
+          </a:prstGeom>
+        </p:spPr>
+      </p:pic>
+      <p:sp>
+        <p:nvSpPr>
+          <p:cNvPr id="13" name="Freeform: Shape 12">
+            <a:extLst>
+              <a:ext uri="{FF2B5EF4-FFF2-40B4-BE49-F238E27FC236}">
+                <a16:creationId xmlns:a16="http://schemas.microsoft.com/office/drawing/2014/main" id="{1DEF5417-8127-DE44-DCE1-8A561ABACAFE}"/>
+              </a:ext>
+            </a:extLst>
+          </p:cNvPr>
+          <p:cNvSpPr/>
+          <p:nvPr/>
+        </p:nvSpPr>
+        <p:spPr>
+          <a:xfrm rot="20831415">
+            <a:off x="2452646" y="2204467"/>
+            <a:ext cx="1276824" cy="1854712"/>
+          </a:xfrm>
+          <a:custGeom>
+            <a:avLst/>
+            <a:gdLst>
+              <a:gd name="connsiteX0" fmla="*/ 521493 w 1195387"/>
+              <a:gd name="connsiteY0" fmla="*/ 1612106 h 1774031"/>
+              <a:gd name="connsiteX1" fmla="*/ 521493 w 1195387"/>
+              <a:gd name="connsiteY1" fmla="*/ 1612106 h 1774031"/>
+              <a:gd name="connsiteX2" fmla="*/ 607218 w 1195387"/>
+              <a:gd name="connsiteY2" fmla="*/ 1678781 h 1774031"/>
+              <a:gd name="connsiteX3" fmla="*/ 697706 w 1195387"/>
+              <a:gd name="connsiteY3" fmla="*/ 1750219 h 1774031"/>
+              <a:gd name="connsiteX4" fmla="*/ 709612 w 1195387"/>
+              <a:gd name="connsiteY4" fmla="*/ 1774031 h 1774031"/>
+              <a:gd name="connsiteX5" fmla="*/ 800100 w 1195387"/>
+              <a:gd name="connsiteY5" fmla="*/ 1738313 h 1774031"/>
+              <a:gd name="connsiteX6" fmla="*/ 862012 w 1195387"/>
+              <a:gd name="connsiteY6" fmla="*/ 1714500 h 1774031"/>
+              <a:gd name="connsiteX7" fmla="*/ 885825 w 1195387"/>
+              <a:gd name="connsiteY7" fmla="*/ 1690688 h 1774031"/>
+              <a:gd name="connsiteX8" fmla="*/ 983456 w 1195387"/>
+              <a:gd name="connsiteY8" fmla="*/ 1666875 h 1774031"/>
+              <a:gd name="connsiteX9" fmla="*/ 1033462 w 1195387"/>
+              <a:gd name="connsiteY9" fmla="*/ 1602581 h 1774031"/>
+              <a:gd name="connsiteX10" fmla="*/ 1050131 w 1195387"/>
+              <a:gd name="connsiteY10" fmla="*/ 1590675 h 1774031"/>
+              <a:gd name="connsiteX11" fmla="*/ 1059656 w 1195387"/>
+              <a:gd name="connsiteY11" fmla="*/ 1554956 h 1774031"/>
+              <a:gd name="connsiteX12" fmla="*/ 1073943 w 1195387"/>
+              <a:gd name="connsiteY12" fmla="*/ 1519238 h 1774031"/>
+              <a:gd name="connsiteX13" fmla="*/ 1085850 w 1195387"/>
+              <a:gd name="connsiteY13" fmla="*/ 1478756 h 1774031"/>
+              <a:gd name="connsiteX14" fmla="*/ 1076325 w 1195387"/>
+              <a:gd name="connsiteY14" fmla="*/ 1366838 h 1774031"/>
+              <a:gd name="connsiteX15" fmla="*/ 1050131 w 1195387"/>
+              <a:gd name="connsiteY15" fmla="*/ 1312069 h 1774031"/>
+              <a:gd name="connsiteX16" fmla="*/ 1019175 w 1195387"/>
+              <a:gd name="connsiteY16" fmla="*/ 1252538 h 1774031"/>
+              <a:gd name="connsiteX17" fmla="*/ 1007268 w 1195387"/>
+              <a:gd name="connsiteY17" fmla="*/ 1226344 h 1774031"/>
+              <a:gd name="connsiteX18" fmla="*/ 966787 w 1195387"/>
+              <a:gd name="connsiteY18" fmla="*/ 1200150 h 1774031"/>
+              <a:gd name="connsiteX19" fmla="*/ 954881 w 1195387"/>
+              <a:gd name="connsiteY19" fmla="*/ 1181100 h 1774031"/>
+              <a:gd name="connsiteX20" fmla="*/ 942975 w 1195387"/>
+              <a:gd name="connsiteY20" fmla="*/ 1169194 h 1774031"/>
+              <a:gd name="connsiteX21" fmla="*/ 928687 w 1195387"/>
+              <a:gd name="connsiteY21" fmla="*/ 1143000 h 1774031"/>
+              <a:gd name="connsiteX22" fmla="*/ 914400 w 1195387"/>
+              <a:gd name="connsiteY22" fmla="*/ 1081088 h 1774031"/>
+              <a:gd name="connsiteX23" fmla="*/ 938212 w 1195387"/>
+              <a:gd name="connsiteY23" fmla="*/ 995363 h 1774031"/>
+              <a:gd name="connsiteX24" fmla="*/ 952500 w 1195387"/>
+              <a:gd name="connsiteY24" fmla="*/ 981075 h 1774031"/>
+              <a:gd name="connsiteX25" fmla="*/ 964406 w 1195387"/>
+              <a:gd name="connsiteY25" fmla="*/ 962025 h 1774031"/>
+              <a:gd name="connsiteX26" fmla="*/ 1000125 w 1195387"/>
+              <a:gd name="connsiteY26" fmla="*/ 890588 h 1774031"/>
+              <a:gd name="connsiteX27" fmla="*/ 1012031 w 1195387"/>
+              <a:gd name="connsiteY27" fmla="*/ 866775 h 1774031"/>
+              <a:gd name="connsiteX28" fmla="*/ 1035843 w 1195387"/>
+              <a:gd name="connsiteY28" fmla="*/ 828675 h 1774031"/>
+              <a:gd name="connsiteX29" fmla="*/ 1062037 w 1195387"/>
+              <a:gd name="connsiteY29" fmla="*/ 795338 h 1774031"/>
+              <a:gd name="connsiteX30" fmla="*/ 1157287 w 1195387"/>
+              <a:gd name="connsiteY30" fmla="*/ 647700 h 1774031"/>
+              <a:gd name="connsiteX31" fmla="*/ 1169193 w 1195387"/>
+              <a:gd name="connsiteY31" fmla="*/ 585788 h 1774031"/>
+              <a:gd name="connsiteX32" fmla="*/ 1195387 w 1195387"/>
+              <a:gd name="connsiteY32" fmla="*/ 481013 h 1774031"/>
+              <a:gd name="connsiteX33" fmla="*/ 1171575 w 1195387"/>
+              <a:gd name="connsiteY33" fmla="*/ 350044 h 1774031"/>
+              <a:gd name="connsiteX34" fmla="*/ 1133475 w 1195387"/>
+              <a:gd name="connsiteY34" fmla="*/ 311944 h 1774031"/>
+              <a:gd name="connsiteX35" fmla="*/ 1119187 w 1195387"/>
+              <a:gd name="connsiteY35" fmla="*/ 273844 h 1774031"/>
+              <a:gd name="connsiteX36" fmla="*/ 1088231 w 1195387"/>
+              <a:gd name="connsiteY36" fmla="*/ 230981 h 1774031"/>
+              <a:gd name="connsiteX37" fmla="*/ 1007268 w 1195387"/>
+              <a:gd name="connsiteY37" fmla="*/ 142875 h 1774031"/>
+              <a:gd name="connsiteX38" fmla="*/ 969168 w 1195387"/>
+              <a:gd name="connsiteY38" fmla="*/ 116681 h 1774031"/>
+              <a:gd name="connsiteX39" fmla="*/ 942975 w 1195387"/>
+              <a:gd name="connsiteY39" fmla="*/ 104775 h 1774031"/>
+              <a:gd name="connsiteX40" fmla="*/ 819150 w 1195387"/>
+              <a:gd name="connsiteY40" fmla="*/ 11906 h 1774031"/>
+              <a:gd name="connsiteX41" fmla="*/ 802481 w 1195387"/>
+              <a:gd name="connsiteY41" fmla="*/ 0 h 1774031"/>
+              <a:gd name="connsiteX42" fmla="*/ 611981 w 1195387"/>
+              <a:gd name="connsiteY42" fmla="*/ 52388 h 1774031"/>
+              <a:gd name="connsiteX43" fmla="*/ 573881 w 1195387"/>
+              <a:gd name="connsiteY43" fmla="*/ 90488 h 1774031"/>
+              <a:gd name="connsiteX44" fmla="*/ 502443 w 1195387"/>
+              <a:gd name="connsiteY44" fmla="*/ 142875 h 1774031"/>
+              <a:gd name="connsiteX45" fmla="*/ 478631 w 1195387"/>
+              <a:gd name="connsiteY45" fmla="*/ 169069 h 1774031"/>
+              <a:gd name="connsiteX46" fmla="*/ 416718 w 1195387"/>
+              <a:gd name="connsiteY46" fmla="*/ 207169 h 1774031"/>
+              <a:gd name="connsiteX47" fmla="*/ 411956 w 1195387"/>
+              <a:gd name="connsiteY47" fmla="*/ 242888 h 1774031"/>
+              <a:gd name="connsiteX48" fmla="*/ 385762 w 1195387"/>
+              <a:gd name="connsiteY48" fmla="*/ 254794 h 1774031"/>
+              <a:gd name="connsiteX49" fmla="*/ 373856 w 1195387"/>
+              <a:gd name="connsiteY49" fmla="*/ 304800 h 1774031"/>
+              <a:gd name="connsiteX50" fmla="*/ 347662 w 1195387"/>
+              <a:gd name="connsiteY50" fmla="*/ 328613 h 1774031"/>
+              <a:gd name="connsiteX51" fmla="*/ 326231 w 1195387"/>
+              <a:gd name="connsiteY51" fmla="*/ 364331 h 1774031"/>
+              <a:gd name="connsiteX52" fmla="*/ 300037 w 1195387"/>
+              <a:gd name="connsiteY52" fmla="*/ 376238 h 1774031"/>
+              <a:gd name="connsiteX53" fmla="*/ 188118 w 1195387"/>
+              <a:gd name="connsiteY53" fmla="*/ 433388 h 1774031"/>
+              <a:gd name="connsiteX54" fmla="*/ 119062 w 1195387"/>
+              <a:gd name="connsiteY54" fmla="*/ 497681 h 1774031"/>
+              <a:gd name="connsiteX55" fmla="*/ 90487 w 1195387"/>
+              <a:gd name="connsiteY55" fmla="*/ 509588 h 1774031"/>
+              <a:gd name="connsiteX56" fmla="*/ 73818 w 1195387"/>
+              <a:gd name="connsiteY56" fmla="*/ 554831 h 1774031"/>
+              <a:gd name="connsiteX57" fmla="*/ 61912 w 1195387"/>
+              <a:gd name="connsiteY57" fmla="*/ 604838 h 1774031"/>
+              <a:gd name="connsiteX58" fmla="*/ 38100 w 1195387"/>
+              <a:gd name="connsiteY58" fmla="*/ 628650 h 1774031"/>
+              <a:gd name="connsiteX59" fmla="*/ 11906 w 1195387"/>
+              <a:gd name="connsiteY59" fmla="*/ 671513 h 1774031"/>
+              <a:gd name="connsiteX60" fmla="*/ 0 w 1195387"/>
+              <a:gd name="connsiteY60" fmla="*/ 683419 h 1774031"/>
+              <a:gd name="connsiteX61" fmla="*/ 40481 w 1195387"/>
+              <a:gd name="connsiteY61" fmla="*/ 873919 h 1774031"/>
+              <a:gd name="connsiteX62" fmla="*/ 66675 w 1195387"/>
+              <a:gd name="connsiteY62" fmla="*/ 885825 h 1774031"/>
+              <a:gd name="connsiteX63" fmla="*/ 107156 w 1195387"/>
+              <a:gd name="connsiteY63" fmla="*/ 988219 h 1774031"/>
+              <a:gd name="connsiteX64" fmla="*/ 145256 w 1195387"/>
+              <a:gd name="connsiteY64" fmla="*/ 1019175 h 1774031"/>
+              <a:gd name="connsiteX65" fmla="*/ 204787 w 1195387"/>
+              <a:gd name="connsiteY65" fmla="*/ 1078706 h 1774031"/>
+              <a:gd name="connsiteX66" fmla="*/ 235743 w 1195387"/>
+              <a:gd name="connsiteY66" fmla="*/ 1097756 h 1774031"/>
+              <a:gd name="connsiteX67" fmla="*/ 309562 w 1195387"/>
+              <a:gd name="connsiteY67" fmla="*/ 1147763 h 1774031"/>
+              <a:gd name="connsiteX68" fmla="*/ 347662 w 1195387"/>
+              <a:gd name="connsiteY68" fmla="*/ 1212056 h 1774031"/>
+              <a:gd name="connsiteX69" fmla="*/ 392906 w 1195387"/>
+              <a:gd name="connsiteY69" fmla="*/ 1245394 h 1774031"/>
+              <a:gd name="connsiteX70" fmla="*/ 411956 w 1195387"/>
+              <a:gd name="connsiteY70" fmla="*/ 1276350 h 1774031"/>
+              <a:gd name="connsiteX71" fmla="*/ 454818 w 1195387"/>
+              <a:gd name="connsiteY71" fmla="*/ 1319213 h 1774031"/>
+              <a:gd name="connsiteX72" fmla="*/ 478631 w 1195387"/>
+              <a:gd name="connsiteY72" fmla="*/ 1350169 h 1774031"/>
+              <a:gd name="connsiteX73" fmla="*/ 492918 w 1195387"/>
+              <a:gd name="connsiteY73" fmla="*/ 1423988 h 1774031"/>
+              <a:gd name="connsiteX74" fmla="*/ 504825 w 1195387"/>
+              <a:gd name="connsiteY74" fmla="*/ 1447800 h 1774031"/>
+              <a:gd name="connsiteX75" fmla="*/ 519112 w 1195387"/>
+              <a:gd name="connsiteY75" fmla="*/ 1521619 h 1774031"/>
+              <a:gd name="connsiteX76" fmla="*/ 542925 w 1195387"/>
+              <a:gd name="connsiteY76" fmla="*/ 1588294 h 1774031"/>
+              <a:gd name="connsiteX77" fmla="*/ 521493 w 1195387"/>
+              <a:gd name="connsiteY77" fmla="*/ 1612106 h 1774031"/>
+            </a:gdLst>
+            <a:ahLst/>
+            <a:cxnLst>
+              <a:cxn ang="0">
+                <a:pos x="connsiteX0" y="connsiteY0"/>
+              </a:cxn>
+              <a:cxn ang="0">
+                <a:pos x="connsiteX1" y="connsiteY1"/>
+              </a:cxn>
+              <a:cxn ang="0">
+                <a:pos x="connsiteX2" y="connsiteY2"/>
+              </a:cxn>
+              <a:cxn ang="0">
+                <a:pos x="connsiteX3" y="connsiteY3"/>
+              </a:cxn>
+              <a:cxn ang="0">
+                <a:pos x="connsiteX4" y="connsiteY4"/>
+              </a:cxn>
+              <a:cxn ang="0">
+                <a:pos x="connsiteX5" y="connsiteY5"/>
+              </a:cxn>
+              <a:cxn ang="0">
+                <a:pos x="connsiteX6" y="connsiteY6"/>
+              </a:cxn>
+              <a:cxn ang="0">
+                <a:pos x="connsiteX7" y="connsiteY7"/>
+              </a:cxn>
+              <a:cxn ang="0">
+                <a:pos x="connsiteX8" y="connsiteY8"/>
+              </a:cxn>
+              <a:cxn ang="0">
+                <a:pos x="connsiteX9" y="connsiteY9"/>
+              </a:cxn>
+              <a:cxn ang="0">
+                <a:pos x="connsiteX10" y="connsiteY10"/>
+              </a:cxn>
+              <a:cxn ang="0">
+                <a:pos x="connsiteX11" y="connsiteY11"/>
+              </a:cxn>
+              <a:cxn ang="0">
+                <a:pos x="connsiteX12" y="connsiteY12"/>
+              </a:cxn>
+              <a:cxn ang="0">
+                <a:pos x="connsiteX13" y="connsiteY13"/>
+              </a:cxn>
+              <a:cxn ang="0">
+                <a:pos x="connsiteX14" y="connsiteY14"/>
+              </a:cxn>
+              <a:cxn ang="0">
+                <a:pos x="connsiteX15" y="connsiteY15"/>
+              </a:cxn>
+              <a:cxn ang="0">
+                <a:pos x="connsiteX16" y="connsiteY16"/>
+              </a:cxn>
+              <a:cxn ang="0">
+                <a:pos x="connsiteX17" y="connsiteY17"/>
+              </a:cxn>
+              <a:cxn ang="0">
+                <a:pos x="connsiteX18" y="connsiteY18"/>
+              </a:cxn>
+              <a:cxn ang="0">
+                <a:pos x="connsiteX19" y="connsiteY19"/>
+              </a:cxn>
+              <a:cxn ang="0">
+                <a:pos x="connsiteX20" y="connsiteY20"/>
+              </a:cxn>
+              <a:cxn ang="0">
+                <a:pos x="connsiteX21" y="connsiteY21"/>
+              </a:cxn>
+              <a:cxn ang="0">
+                <a:pos x="connsiteX22" y="connsiteY22"/>
+              </a:cxn>
+              <a:cxn ang="0">
+                <a:pos x="connsiteX23" y="connsiteY23"/>
+              </a:cxn>
+              <a:cxn ang="0">
+                <a:pos x="connsiteX24" y="connsiteY24"/>
+              </a:cxn>
+              <a:cxn ang="0">
+                <a:pos x="connsiteX25" y="connsiteY25"/>
+              </a:cxn>
+              <a:cxn ang="0">
+                <a:pos x="connsiteX26" y="connsiteY26"/>
+              </a:cxn>
+              <a:cxn ang="0">
+                <a:pos x="connsiteX27" y="connsiteY27"/>
+              </a:cxn>
+              <a:cxn ang="0">
+                <a:pos x="connsiteX28" y="connsiteY28"/>
+              </a:cxn>
+              <a:cxn ang="0">
+                <a:pos x="connsiteX29" y="connsiteY29"/>
+              </a:cxn>
+              <a:cxn ang="0">
+                <a:pos x="connsiteX30" y="connsiteY30"/>
+              </a:cxn>
+              <a:cxn ang="0">
+                <a:pos x="connsiteX31" y="connsiteY31"/>
+              </a:cxn>
+              <a:cxn ang="0">
+                <a:pos x="connsiteX32" y="connsiteY32"/>
+              </a:cxn>
+              <a:cxn ang="0">
+                <a:pos x="connsiteX33" y="connsiteY33"/>
+              </a:cxn>
+              <a:cxn ang="0">
+                <a:pos x="connsiteX34" y="connsiteY34"/>
+              </a:cxn>
+              <a:cxn ang="0">
+                <a:pos x="connsiteX35" y="connsiteY35"/>
+              </a:cxn>
+              <a:cxn ang="0">
+                <a:pos x="connsiteX36" y="connsiteY36"/>
+              </a:cxn>
+              <a:cxn ang="0">
+                <a:pos x="connsiteX37" y="connsiteY37"/>
+              </a:cxn>
+              <a:cxn ang="0">
+                <a:pos x="connsiteX38" y="connsiteY38"/>
+              </a:cxn>
+              <a:cxn ang="0">
+                <a:pos x="connsiteX39" y="connsiteY39"/>
+              </a:cxn>
+              <a:cxn ang="0">
+                <a:pos x="connsiteX40" y="connsiteY40"/>
+              </a:cxn>
+              <a:cxn ang="0">
+                <a:pos x="connsiteX41" y="connsiteY41"/>
+              </a:cxn>
+              <a:cxn ang="0">
+                <a:pos x="connsiteX42" y="connsiteY42"/>
+              </a:cxn>
+              <a:cxn ang="0">
+                <a:pos x="connsiteX43" y="connsiteY43"/>
+              </a:cxn>
+              <a:cxn ang="0">
+                <a:pos x="connsiteX44" y="connsiteY44"/>
+              </a:cxn>
+              <a:cxn ang="0">
+                <a:pos x="connsiteX45" y="connsiteY45"/>
+              </a:cxn>
+              <a:cxn ang="0">
+                <a:pos x="connsiteX46" y="connsiteY46"/>
+              </a:cxn>
+              <a:cxn ang="0">
+                <a:pos x="connsiteX47" y="connsiteY47"/>
+              </a:cxn>
+              <a:cxn ang="0">
+                <a:pos x="connsiteX48" y="connsiteY48"/>
+              </a:cxn>
+              <a:cxn ang="0">
+                <a:pos x="connsiteX49" y="connsiteY49"/>
+              </a:cxn>
+              <a:cxn ang="0">
+                <a:pos x="connsiteX50" y="connsiteY50"/>
+              </a:cxn>
+              <a:cxn ang="0">
+                <a:pos x="connsiteX51" y="connsiteY51"/>
+              </a:cxn>
+              <a:cxn ang="0">
+                <a:pos x="connsiteX52" y="connsiteY52"/>
+              </a:cxn>
+              <a:cxn ang="0">
+                <a:pos x="connsiteX53" y="connsiteY53"/>
+              </a:cxn>
+              <a:cxn ang="0">
+                <a:pos x="connsiteX54" y="connsiteY54"/>
+              </a:cxn>
+              <a:cxn ang="0">
+                <a:pos x="connsiteX55" y="connsiteY55"/>
+              </a:cxn>
+              <a:cxn ang="0">
+                <a:pos x="connsiteX56" y="connsiteY56"/>
+              </a:cxn>
+              <a:cxn ang="0">
+                <a:pos x="connsiteX57" y="connsiteY57"/>
+              </a:cxn>
+              <a:cxn ang="0">
+                <a:pos x="connsiteX58" y="connsiteY58"/>
+              </a:cxn>
+              <a:cxn ang="0">
+                <a:pos x="connsiteX59" y="connsiteY59"/>
+              </a:cxn>
+              <a:cxn ang="0">
+                <a:pos x="connsiteX60" y="connsiteY60"/>
+              </a:cxn>
+              <a:cxn ang="0">
+                <a:pos x="connsiteX61" y="connsiteY61"/>
+              </a:cxn>
+              <a:cxn ang="0">
+                <a:pos x="connsiteX62" y="connsiteY62"/>
+              </a:cxn>
+              <a:cxn ang="0">
+                <a:pos x="connsiteX63" y="connsiteY63"/>
+              </a:cxn>
+              <a:cxn ang="0">
+                <a:pos x="connsiteX64" y="connsiteY64"/>
+              </a:cxn>
+              <a:cxn ang="0">
+                <a:pos x="connsiteX65" y="connsiteY65"/>
+              </a:cxn>
+              <a:cxn ang="0">
+                <a:pos x="connsiteX66" y="connsiteY66"/>
+              </a:cxn>
+              <a:cxn ang="0">
+                <a:pos x="connsiteX67" y="connsiteY67"/>
+              </a:cxn>
+              <a:cxn ang="0">
+                <a:pos x="connsiteX68" y="connsiteY68"/>
+              </a:cxn>
+              <a:cxn ang="0">
+                <a:pos x="connsiteX69" y="connsiteY69"/>
+              </a:cxn>
+              <a:cxn ang="0">
+                <a:pos x="connsiteX70" y="connsiteY70"/>
+              </a:cxn>
+              <a:cxn ang="0">
+                <a:pos x="connsiteX71" y="connsiteY71"/>
+              </a:cxn>
+              <a:cxn ang="0">
+                <a:pos x="connsiteX72" y="connsiteY72"/>
+              </a:cxn>
+              <a:cxn ang="0">
+                <a:pos x="connsiteX73" y="connsiteY73"/>
+              </a:cxn>
+              <a:cxn ang="0">
+                <a:pos x="connsiteX74" y="connsiteY74"/>
+              </a:cxn>
+              <a:cxn ang="0">
+                <a:pos x="connsiteX75" y="connsiteY75"/>
+              </a:cxn>
+              <a:cxn ang="0">
+                <a:pos x="connsiteX76" y="connsiteY76"/>
+              </a:cxn>
+              <a:cxn ang="0">
+                <a:pos x="connsiteX77" y="connsiteY77"/>
+              </a:cxn>
+            </a:cxnLst>
+            <a:rect l="l" t="t" r="r" b="b"/>
+            <a:pathLst>
+              <a:path w="1195387" h="1774031">
+                <a:moveTo>
+                  <a:pt x="521493" y="1612106"/>
+                </a:moveTo>
+                <a:lnTo>
+                  <a:pt x="521493" y="1612106"/>
+                </a:lnTo>
+                <a:cubicBezTo>
+                  <a:pt x="614341" y="1658531"/>
+                  <a:pt x="527035" y="1607507"/>
+                  <a:pt x="607218" y="1678781"/>
+                </a:cubicBezTo>
+                <a:cubicBezTo>
+                  <a:pt x="635941" y="1704312"/>
+                  <a:pt x="697706" y="1750219"/>
+                  <a:pt x="697706" y="1750219"/>
+                </a:cubicBezTo>
+                <a:cubicBezTo>
+                  <a:pt x="701675" y="1758156"/>
+                  <a:pt x="700738" y="1774031"/>
+                  <a:pt x="709612" y="1774031"/>
+                </a:cubicBezTo>
+                <a:cubicBezTo>
+                  <a:pt x="731049" y="1774031"/>
+                  <a:pt x="775333" y="1750696"/>
+                  <a:pt x="800100" y="1738313"/>
+                </a:cubicBezTo>
+                <a:cubicBezTo>
+                  <a:pt x="832772" y="1705639"/>
+                  <a:pt x="780139" y="1754115"/>
+                  <a:pt x="862012" y="1714500"/>
+                </a:cubicBezTo>
+                <a:cubicBezTo>
+                  <a:pt x="872117" y="1709611"/>
+                  <a:pt x="874802" y="1692808"/>
+                  <a:pt x="885825" y="1690688"/>
+                </a:cubicBezTo>
+                <a:cubicBezTo>
+                  <a:pt x="960061" y="1676411"/>
+                  <a:pt x="927800" y="1685427"/>
+                  <a:pt x="983456" y="1666875"/>
+                </a:cubicBezTo>
+                <a:cubicBezTo>
+                  <a:pt x="992678" y="1654195"/>
+                  <a:pt x="1014653" y="1618255"/>
+                  <a:pt x="1033462" y="1602581"/>
+                </a:cubicBezTo>
+                <a:cubicBezTo>
+                  <a:pt x="1038707" y="1598210"/>
+                  <a:pt x="1044575" y="1594644"/>
+                  <a:pt x="1050131" y="1590675"/>
+                </a:cubicBezTo>
+                <a:cubicBezTo>
+                  <a:pt x="1053306" y="1578769"/>
+                  <a:pt x="1055759" y="1566646"/>
+                  <a:pt x="1059656" y="1554956"/>
+                </a:cubicBezTo>
+                <a:cubicBezTo>
+                  <a:pt x="1063711" y="1542791"/>
+                  <a:pt x="1069774" y="1531365"/>
+                  <a:pt x="1073943" y="1519238"/>
+                </a:cubicBezTo>
+                <a:cubicBezTo>
+                  <a:pt x="1078515" y="1505936"/>
+                  <a:pt x="1081881" y="1492250"/>
+                  <a:pt x="1085850" y="1478756"/>
+                </a:cubicBezTo>
+                <a:cubicBezTo>
+                  <a:pt x="1082675" y="1441450"/>
+                  <a:pt x="1084170" y="1403448"/>
+                  <a:pt x="1076325" y="1366838"/>
+                </a:cubicBezTo>
+                <a:cubicBezTo>
+                  <a:pt x="1072085" y="1347050"/>
+                  <a:pt x="1057748" y="1330818"/>
+                  <a:pt x="1050131" y="1312069"/>
+                </a:cubicBezTo>
+                <a:cubicBezTo>
+                  <a:pt x="1016343" y="1228900"/>
+                  <a:pt x="1103599" y="1395004"/>
+                  <a:pt x="1019175" y="1252538"/>
+                </a:cubicBezTo>
+                <a:cubicBezTo>
+                  <a:pt x="1014285" y="1244287"/>
+                  <a:pt x="1014050" y="1233126"/>
+                  <a:pt x="1007268" y="1226344"/>
+                </a:cubicBezTo>
+                <a:cubicBezTo>
+                  <a:pt x="995903" y="1214979"/>
+                  <a:pt x="980281" y="1208881"/>
+                  <a:pt x="966787" y="1200150"/>
+                </a:cubicBezTo>
+                <a:cubicBezTo>
+                  <a:pt x="962818" y="1193800"/>
+                  <a:pt x="959447" y="1187035"/>
+                  <a:pt x="954881" y="1181100"/>
+                </a:cubicBezTo>
+                <a:cubicBezTo>
+                  <a:pt x="951459" y="1176651"/>
+                  <a:pt x="946155" y="1173819"/>
+                  <a:pt x="942975" y="1169194"/>
+                </a:cubicBezTo>
+                <a:cubicBezTo>
+                  <a:pt x="937340" y="1160998"/>
+                  <a:pt x="933450" y="1151731"/>
+                  <a:pt x="928687" y="1143000"/>
+                </a:cubicBezTo>
+                <a:cubicBezTo>
+                  <a:pt x="923925" y="1122363"/>
+                  <a:pt x="915320" y="1102248"/>
+                  <a:pt x="914400" y="1081088"/>
+                </a:cubicBezTo>
+                <a:cubicBezTo>
+                  <a:pt x="913646" y="1063751"/>
+                  <a:pt x="929081" y="1012104"/>
+                  <a:pt x="938212" y="995363"/>
+                </a:cubicBezTo>
+                <a:cubicBezTo>
+                  <a:pt x="941437" y="989450"/>
+                  <a:pt x="948339" y="986371"/>
+                  <a:pt x="952500" y="981075"/>
+                </a:cubicBezTo>
+                <a:cubicBezTo>
+                  <a:pt x="957126" y="975187"/>
+                  <a:pt x="960870" y="968626"/>
+                  <a:pt x="964406" y="962025"/>
+                </a:cubicBezTo>
+                <a:cubicBezTo>
+                  <a:pt x="976978" y="938557"/>
+                  <a:pt x="988219" y="914400"/>
+                  <a:pt x="1000125" y="890588"/>
+                </a:cubicBezTo>
+                <a:cubicBezTo>
+                  <a:pt x="1004094" y="882650"/>
+                  <a:pt x="1007328" y="874301"/>
+                  <a:pt x="1012031" y="866775"/>
+                </a:cubicBezTo>
+                <a:cubicBezTo>
+                  <a:pt x="1019968" y="854075"/>
+                  <a:pt x="1027255" y="840944"/>
+                  <a:pt x="1035843" y="828675"/>
+                </a:cubicBezTo>
+                <a:cubicBezTo>
+                  <a:pt x="1043947" y="817097"/>
+                  <a:pt x="1053993" y="806957"/>
+                  <a:pt x="1062037" y="795338"/>
+                </a:cubicBezTo>
+                <a:cubicBezTo>
+                  <a:pt x="1136164" y="688266"/>
+                  <a:pt x="1122229" y="711977"/>
+                  <a:pt x="1157287" y="647700"/>
+                </a:cubicBezTo>
+                <a:cubicBezTo>
+                  <a:pt x="1161256" y="627063"/>
+                  <a:pt x="1164844" y="606348"/>
+                  <a:pt x="1169193" y="585788"/>
+                </a:cubicBezTo>
+                <a:cubicBezTo>
+                  <a:pt x="1180655" y="531602"/>
+                  <a:pt x="1182125" y="528757"/>
+                  <a:pt x="1195387" y="481013"/>
+                </a:cubicBezTo>
+                <a:cubicBezTo>
+                  <a:pt x="1187450" y="437357"/>
+                  <a:pt x="1186833" y="391710"/>
+                  <a:pt x="1171575" y="350044"/>
+                </a:cubicBezTo>
+                <a:cubicBezTo>
+                  <a:pt x="1165399" y="333179"/>
+                  <a:pt x="1133475" y="311944"/>
+                  <a:pt x="1133475" y="311944"/>
+                </a:cubicBezTo>
+                <a:cubicBezTo>
+                  <a:pt x="1128712" y="299244"/>
+                  <a:pt x="1125804" y="285684"/>
+                  <a:pt x="1119187" y="273844"/>
+                </a:cubicBezTo>
+                <a:cubicBezTo>
+                  <a:pt x="1110590" y="258459"/>
+                  <a:pt x="1099093" y="244860"/>
+                  <a:pt x="1088231" y="230981"/>
+                </a:cubicBezTo>
+                <a:cubicBezTo>
+                  <a:pt x="1051076" y="183505"/>
+                  <a:pt x="1046005" y="171569"/>
+                  <a:pt x="1007268" y="142875"/>
+                </a:cubicBezTo>
+                <a:cubicBezTo>
+                  <a:pt x="994884" y="133701"/>
+                  <a:pt x="982427" y="124538"/>
+                  <a:pt x="969168" y="116681"/>
+                </a:cubicBezTo>
+                <a:cubicBezTo>
+                  <a:pt x="960917" y="111792"/>
+                  <a:pt x="950838" y="110267"/>
+                  <a:pt x="942975" y="104775"/>
+                </a:cubicBezTo>
+                <a:cubicBezTo>
+                  <a:pt x="900676" y="75233"/>
+                  <a:pt x="860509" y="42750"/>
+                  <a:pt x="819150" y="11906"/>
+                </a:cubicBezTo>
+                <a:cubicBezTo>
+                  <a:pt x="813676" y="7824"/>
+                  <a:pt x="802481" y="0"/>
+                  <a:pt x="802481" y="0"/>
+                </a:cubicBezTo>
+                <a:cubicBezTo>
+                  <a:pt x="711345" y="13756"/>
+                  <a:pt x="680600" y="4514"/>
+                  <a:pt x="611981" y="52388"/>
+                </a:cubicBezTo>
+                <a:cubicBezTo>
+                  <a:pt x="597251" y="62665"/>
+                  <a:pt x="587728" y="79049"/>
+                  <a:pt x="573881" y="90488"/>
+                </a:cubicBezTo>
+                <a:cubicBezTo>
+                  <a:pt x="551115" y="109295"/>
+                  <a:pt x="525221" y="124083"/>
+                  <a:pt x="502443" y="142875"/>
+                </a:cubicBezTo>
+                <a:cubicBezTo>
+                  <a:pt x="493341" y="150384"/>
+                  <a:pt x="488071" y="161989"/>
+                  <a:pt x="478631" y="169069"/>
+                </a:cubicBezTo>
+                <a:cubicBezTo>
+                  <a:pt x="459245" y="183608"/>
+                  <a:pt x="416718" y="207169"/>
+                  <a:pt x="416718" y="207169"/>
+                </a:cubicBezTo>
+                <a:cubicBezTo>
+                  <a:pt x="415131" y="219075"/>
+                  <a:pt x="418502" y="232817"/>
+                  <a:pt x="411956" y="242888"/>
+                </a:cubicBezTo>
+                <a:cubicBezTo>
+                  <a:pt x="406729" y="250929"/>
+                  <a:pt x="390789" y="246626"/>
+                  <a:pt x="385762" y="254794"/>
+                </a:cubicBezTo>
+                <a:cubicBezTo>
+                  <a:pt x="376782" y="269387"/>
+                  <a:pt x="380007" y="288807"/>
+                  <a:pt x="373856" y="304800"/>
+                </a:cubicBezTo>
+                <a:cubicBezTo>
+                  <a:pt x="371497" y="310935"/>
+                  <a:pt x="350874" y="324330"/>
+                  <a:pt x="347662" y="328613"/>
+                </a:cubicBezTo>
+                <a:cubicBezTo>
+                  <a:pt x="339331" y="339721"/>
+                  <a:pt x="336049" y="354513"/>
+                  <a:pt x="326231" y="364331"/>
+                </a:cubicBezTo>
+                <a:cubicBezTo>
+                  <a:pt x="319449" y="371113"/>
+                  <a:pt x="308364" y="371480"/>
+                  <a:pt x="300037" y="376238"/>
+                </a:cubicBezTo>
+                <a:cubicBezTo>
+                  <a:pt x="201234" y="432697"/>
+                  <a:pt x="260053" y="410907"/>
+                  <a:pt x="188118" y="433388"/>
+                </a:cubicBezTo>
+                <a:cubicBezTo>
+                  <a:pt x="162020" y="460729"/>
+                  <a:pt x="149564" y="482430"/>
+                  <a:pt x="119062" y="497681"/>
+                </a:cubicBezTo>
+                <a:cubicBezTo>
+                  <a:pt x="109833" y="502296"/>
+                  <a:pt x="100012" y="505619"/>
+                  <a:pt x="90487" y="509588"/>
+                </a:cubicBezTo>
+                <a:cubicBezTo>
+                  <a:pt x="84728" y="523986"/>
+                  <a:pt x="77817" y="540835"/>
+                  <a:pt x="73818" y="554831"/>
+                </a:cubicBezTo>
+                <a:cubicBezTo>
+                  <a:pt x="69111" y="571307"/>
+                  <a:pt x="69375" y="589414"/>
+                  <a:pt x="61912" y="604838"/>
+                </a:cubicBezTo>
+                <a:cubicBezTo>
+                  <a:pt x="57023" y="614942"/>
+                  <a:pt x="45558" y="620260"/>
+                  <a:pt x="38100" y="628650"/>
+                </a:cubicBezTo>
+                <a:cubicBezTo>
+                  <a:pt x="10949" y="659194"/>
+                  <a:pt x="35790" y="635687"/>
+                  <a:pt x="11906" y="671513"/>
+                </a:cubicBezTo>
+                <a:cubicBezTo>
+                  <a:pt x="8793" y="676183"/>
+                  <a:pt x="3969" y="679450"/>
+                  <a:pt x="0" y="683419"/>
+                </a:cubicBezTo>
+                <a:cubicBezTo>
+                  <a:pt x="6229" y="760661"/>
+                  <a:pt x="-13026" y="820412"/>
+                  <a:pt x="40481" y="873919"/>
+                </a:cubicBezTo>
+                <a:cubicBezTo>
+                  <a:pt x="47263" y="880701"/>
+                  <a:pt x="57944" y="881856"/>
+                  <a:pt x="66675" y="885825"/>
+                </a:cubicBezTo>
+                <a:cubicBezTo>
+                  <a:pt x="76701" y="920916"/>
+                  <a:pt x="84049" y="958265"/>
+                  <a:pt x="107156" y="988219"/>
+                </a:cubicBezTo>
+                <a:cubicBezTo>
+                  <a:pt x="117151" y="1001175"/>
+                  <a:pt x="133254" y="1008052"/>
+                  <a:pt x="145256" y="1019175"/>
+                </a:cubicBezTo>
+                <a:cubicBezTo>
+                  <a:pt x="165838" y="1038251"/>
+                  <a:pt x="180887" y="1063998"/>
+                  <a:pt x="204787" y="1078706"/>
+                </a:cubicBezTo>
+                <a:cubicBezTo>
+                  <a:pt x="215106" y="1085056"/>
+                  <a:pt x="225627" y="1091088"/>
+                  <a:pt x="235743" y="1097756"/>
+                </a:cubicBezTo>
+                <a:cubicBezTo>
+                  <a:pt x="260559" y="1114112"/>
+                  <a:pt x="309562" y="1147763"/>
+                  <a:pt x="309562" y="1147763"/>
+                </a:cubicBezTo>
+                <a:cubicBezTo>
+                  <a:pt x="320391" y="1171586"/>
+                  <a:pt x="328014" y="1192408"/>
+                  <a:pt x="347662" y="1212056"/>
+                </a:cubicBezTo>
+                <a:cubicBezTo>
+                  <a:pt x="360908" y="1225302"/>
+                  <a:pt x="377825" y="1234281"/>
+                  <a:pt x="392906" y="1245394"/>
+                </a:cubicBezTo>
+                <a:cubicBezTo>
+                  <a:pt x="399256" y="1255713"/>
+                  <a:pt x="404170" y="1267067"/>
+                  <a:pt x="411956" y="1276350"/>
+                </a:cubicBezTo>
+                <a:cubicBezTo>
+                  <a:pt x="424940" y="1291831"/>
+                  <a:pt x="442498" y="1303198"/>
+                  <a:pt x="454818" y="1319213"/>
+                </a:cubicBezTo>
+                <a:lnTo>
+                  <a:pt x="478631" y="1350169"/>
+                </a:lnTo>
+                <a:cubicBezTo>
+                  <a:pt x="483393" y="1374775"/>
+                  <a:pt x="486423" y="1399781"/>
+                  <a:pt x="492918" y="1423988"/>
+                </a:cubicBezTo>
+                <a:cubicBezTo>
+                  <a:pt x="495218" y="1432559"/>
+                  <a:pt x="502525" y="1439229"/>
+                  <a:pt x="504825" y="1447800"/>
+                </a:cubicBezTo>
+                <a:cubicBezTo>
+                  <a:pt x="511320" y="1472007"/>
+                  <a:pt x="513622" y="1497165"/>
+                  <a:pt x="519112" y="1521619"/>
+                </a:cubicBezTo>
+                <a:cubicBezTo>
+                  <a:pt x="523694" y="1542031"/>
+                  <a:pt x="530191" y="1569772"/>
+                  <a:pt x="542925" y="1588294"/>
+                </a:cubicBezTo>
+                <a:cubicBezTo>
+                  <a:pt x="546741" y="1593844"/>
+                  <a:pt x="525065" y="1608138"/>
+                  <a:pt x="521493" y="1612106"/>
+                </a:cubicBezTo>
+                <a:close/>
+              </a:path>
+            </a:pathLst>
+          </a:custGeom>
+        </p:spPr>
+        <p:style>
+          <a:lnRef idx="2">
+            <a:schemeClr val="accent1">
+              <a:shade val="15000"/>
+            </a:schemeClr>
+          </a:lnRef>
+          <a:fillRef idx="1">
+            <a:schemeClr val="accent1"/>
+          </a:fillRef>
+          <a:effectRef idx="0">
+            <a:schemeClr val="accent1"/>
+          </a:effectRef>
+          <a:fontRef idx="minor">
+            <a:schemeClr val="lt1"/>
+          </a:fontRef>
+        </p:style>
+        <p:txBody>
+          <a:bodyPr rtlCol="0" anchor="ctr"/>
+          <a:lstStyle/>
+          <a:p>
+            <a:pPr algn="ctr"/>
+            <a:endParaRPr lang="en-US"/>
+          </a:p>
+        </p:txBody>
+      </p:sp>
+      <p:sp>
+        <p:nvSpPr>
+          <p:cNvPr id="14" name="Rectangle 13">
+            <a:extLst>
+              <a:ext uri="{FF2B5EF4-FFF2-40B4-BE49-F238E27FC236}">
+                <a16:creationId xmlns:a16="http://schemas.microsoft.com/office/drawing/2014/main" id="{E8CE74AA-07B4-7F27-953F-976ABB4F8AE5}"/>
+              </a:ext>
+            </a:extLst>
+          </p:cNvPr>
+          <p:cNvSpPr/>
+          <p:nvPr/>
+        </p:nvSpPr>
+        <p:spPr>
+          <a:xfrm rot="5400000">
+            <a:off x="3091058" y="4216922"/>
+            <a:ext cx="720000" cy="720000"/>
+          </a:xfrm>
+          <a:prstGeom prst="rect">
+            <a:avLst/>
+          </a:prstGeom>
+        </p:spPr>
+        <p:style>
+          <a:lnRef idx="2">
+            <a:schemeClr val="accent1">
+              <a:shade val="15000"/>
+            </a:schemeClr>
+          </a:lnRef>
+          <a:fillRef idx="1">
+            <a:schemeClr val="accent1"/>
+          </a:fillRef>
+          <a:effectRef idx="0">
+            <a:schemeClr val="accent1"/>
+          </a:effectRef>
+          <a:fontRef idx="minor">
+            <a:schemeClr val="lt1"/>
+          </a:fontRef>
+        </p:style>
+        <p:txBody>
+          <a:bodyPr rtlCol="0" anchor="ctr"/>
+          <a:lstStyle/>
+          <a:p>
+            <a:pPr algn="ctr"/>
+            <a:endParaRPr lang="en-US"/>
+          </a:p>
+        </p:txBody>
+      </p:sp>
+      <p:sp>
+        <p:nvSpPr>
+          <p:cNvPr id="46" name="Rectangle 45">
+            <a:extLst>
+              <a:ext uri="{FF2B5EF4-FFF2-40B4-BE49-F238E27FC236}">
+                <a16:creationId xmlns:a16="http://schemas.microsoft.com/office/drawing/2014/main" id="{8115C99A-F4D4-F820-363C-8613884D205B}"/>
+              </a:ext>
+            </a:extLst>
+          </p:cNvPr>
+          <p:cNvSpPr/>
+          <p:nvPr/>
+        </p:nvSpPr>
+        <p:spPr>
+          <a:xfrm rot="5400000">
+            <a:off x="10105476" y="813147"/>
+            <a:ext cx="897080" cy="633424"/>
+          </a:xfrm>
+          <a:prstGeom prst="rect">
+            <a:avLst/>
+          </a:prstGeom>
+          <a:solidFill>
+            <a:srgbClr val="156082">
+              <a:alpha val="50196"/>
+            </a:srgbClr>
+          </a:solidFill>
+          <a:ln>
+            <a:noFill/>
+          </a:ln>
+        </p:spPr>
+        <p:style>
+          <a:lnRef idx="2">
+            <a:schemeClr val="accent1">
+              <a:shade val="15000"/>
+            </a:schemeClr>
+          </a:lnRef>
+          <a:fillRef idx="1">
+            <a:schemeClr val="accent1"/>
+          </a:fillRef>
+          <a:effectRef idx="0">
+            <a:schemeClr val="accent1"/>
+          </a:effectRef>
+          <a:fontRef idx="minor">
+            <a:schemeClr val="lt1"/>
+          </a:fontRef>
+        </p:style>
+        <p:txBody>
+          <a:bodyPr rtlCol="0" anchor="ctr"/>
+          <a:lstStyle/>
+          <a:p>
+            <a:pPr algn="ctr"/>
+            <a:endParaRPr lang="en-US"/>
+          </a:p>
+        </p:txBody>
+      </p:sp>
+      <p:sp>
+        <p:nvSpPr>
+          <p:cNvPr id="47" name="Rectangle 46">
+            <a:extLst>
+              <a:ext uri="{FF2B5EF4-FFF2-40B4-BE49-F238E27FC236}">
+                <a16:creationId xmlns:a16="http://schemas.microsoft.com/office/drawing/2014/main" id="{CB81DBAD-DBBE-6042-FCAE-C6AE26DE8C81}"/>
+              </a:ext>
+            </a:extLst>
+          </p:cNvPr>
+          <p:cNvSpPr/>
+          <p:nvPr/>
+        </p:nvSpPr>
+        <p:spPr>
+          <a:xfrm rot="16200000">
+            <a:off x="8923993" y="207487"/>
+            <a:ext cx="838800" cy="478800"/>
+          </a:xfrm>
+          <a:prstGeom prst="rect">
+            <a:avLst/>
+          </a:prstGeom>
+          <a:solidFill>
+            <a:srgbClr val="156082">
+              <a:alpha val="69804"/>
+            </a:srgbClr>
+          </a:solidFill>
+          <a:ln>
+            <a:noFill/>
+          </a:ln>
+        </p:spPr>
+        <p:style>
+          <a:lnRef idx="2">
+            <a:schemeClr val="accent1">
+              <a:shade val="15000"/>
+            </a:schemeClr>
+          </a:lnRef>
+          <a:fillRef idx="1">
+            <a:schemeClr val="accent1"/>
+          </a:fillRef>
+          <a:effectRef idx="0">
+            <a:schemeClr val="accent1"/>
+          </a:effectRef>
+          <a:fontRef idx="minor">
+            <a:schemeClr val="lt1"/>
+          </a:fontRef>
+        </p:style>
+        <p:txBody>
+          <a:bodyPr rtlCol="0" anchor="ctr"/>
+          <a:lstStyle/>
+          <a:p>
+            <a:pPr algn="ctr"/>
+            <a:endParaRPr lang="en-US"/>
+          </a:p>
+        </p:txBody>
+      </p:sp>
+      <p:sp>
+        <p:nvSpPr>
+          <p:cNvPr id="48" name="Rectangle 47">
+            <a:extLst>
+              <a:ext uri="{FF2B5EF4-FFF2-40B4-BE49-F238E27FC236}">
+                <a16:creationId xmlns:a16="http://schemas.microsoft.com/office/drawing/2014/main" id="{51744E52-944C-7DDC-3BFC-F658DEBC073A}"/>
+              </a:ext>
+            </a:extLst>
+          </p:cNvPr>
+          <p:cNvSpPr/>
+          <p:nvPr/>
+        </p:nvSpPr>
+        <p:spPr>
+          <a:xfrm rot="5400000">
+            <a:off x="10030284" y="225825"/>
+            <a:ext cx="177085" cy="1088074"/>
+          </a:xfrm>
+          <a:prstGeom prst="rect">
+            <a:avLst/>
+          </a:prstGeom>
+          <a:solidFill>
+            <a:srgbClr val="156082">
+              <a:alpha val="69804"/>
+            </a:srgbClr>
+          </a:solidFill>
+          <a:ln>
+            <a:noFill/>
+          </a:ln>
+        </p:spPr>
+        <p:style>
+          <a:lnRef idx="2">
+            <a:schemeClr val="accent1">
+              <a:shade val="15000"/>
+            </a:schemeClr>
+          </a:lnRef>
+          <a:fillRef idx="1">
+            <a:schemeClr val="accent1"/>
+          </a:fillRef>
+          <a:effectRef idx="0">
+            <a:schemeClr val="accent1"/>
+          </a:effectRef>
+          <a:fontRef idx="minor">
+            <a:schemeClr val="lt1"/>
+          </a:fontRef>
+        </p:style>
+        <p:txBody>
+          <a:bodyPr rtlCol="0" anchor="ctr"/>
+          <a:lstStyle/>
+          <a:p>
+            <a:pPr algn="ctr"/>
+            <a:endParaRPr lang="en-US"/>
+          </a:p>
+        </p:txBody>
+      </p:sp>
+      <p:sp>
+        <p:nvSpPr>
+          <p:cNvPr id="8" name="Rectangle 7">
+            <a:extLst>
+              <a:ext uri="{FF2B5EF4-FFF2-40B4-BE49-F238E27FC236}">
+                <a16:creationId xmlns:a16="http://schemas.microsoft.com/office/drawing/2014/main" id="{F662EDCE-01EB-34EC-1D6D-A23E3A71D47A}"/>
+              </a:ext>
+            </a:extLst>
+          </p:cNvPr>
+          <p:cNvSpPr/>
+          <p:nvPr/>
+        </p:nvSpPr>
+        <p:spPr>
+          <a:xfrm>
+            <a:off x="1972386" y="1161628"/>
+            <a:ext cx="1440000" cy="720000"/>
+          </a:xfrm>
+          <a:prstGeom prst="rect">
+            <a:avLst/>
+          </a:prstGeom>
+          <a:solidFill>
+            <a:srgbClr val="A6CAEC">
+              <a:alpha val="50196"/>
+            </a:srgbClr>
+          </a:solidFill>
+          <a:ln>
+            <a:solidFill>
+              <a:srgbClr val="FF0000"/>
+            </a:solidFill>
+          </a:ln>
+        </p:spPr>
+        <p:style>
+          <a:lnRef idx="2">
+            <a:schemeClr val="accent1">
+              <a:shade val="15000"/>
+            </a:schemeClr>
+          </a:lnRef>
+          <a:fillRef idx="1">
+            <a:schemeClr val="accent1"/>
+          </a:fillRef>
+          <a:effectRef idx="0">
+            <a:schemeClr val="accent1"/>
+          </a:effectRef>
+          <a:fontRef idx="minor">
+            <a:schemeClr val="lt1"/>
+          </a:fontRef>
+        </p:style>
+        <p:txBody>
+          <a:bodyPr rtlCol="0" anchor="ctr"/>
+          <a:lstStyle/>
+          <a:p>
+            <a:pPr algn="ctr"/>
+            <a:endParaRPr lang="en-US"/>
+          </a:p>
+        </p:txBody>
+      </p:sp>
+      <p:sp>
+        <p:nvSpPr>
+          <p:cNvPr id="54" name="Rectangle 53">
+            <a:extLst>
+              <a:ext uri="{FF2B5EF4-FFF2-40B4-BE49-F238E27FC236}">
+                <a16:creationId xmlns:a16="http://schemas.microsoft.com/office/drawing/2014/main" id="{942065FB-4A20-1714-7D79-08682F9227FB}"/>
+              </a:ext>
+            </a:extLst>
+          </p:cNvPr>
+          <p:cNvSpPr/>
+          <p:nvPr/>
+        </p:nvSpPr>
+        <p:spPr>
+          <a:xfrm>
+            <a:off x="1972386" y="801628"/>
+            <a:ext cx="1082621" cy="360000"/>
+          </a:xfrm>
+          <a:prstGeom prst="rect">
+            <a:avLst/>
+          </a:prstGeom>
+          <a:solidFill>
+            <a:schemeClr val="accent2">
+              <a:lumMod val="60000"/>
+              <a:lumOff val="40000"/>
+              <a:alpha val="50196"/>
+            </a:schemeClr>
+          </a:solidFill>
+          <a:ln>
+            <a:noFill/>
+          </a:ln>
+        </p:spPr>
+        <p:style>
+          <a:lnRef idx="2">
+            <a:schemeClr val="accent1">
+              <a:shade val="15000"/>
+            </a:schemeClr>
+          </a:lnRef>
+          <a:fillRef idx="1">
+            <a:schemeClr val="accent1"/>
+          </a:fillRef>
+          <a:effectRef idx="0">
+            <a:schemeClr val="accent1"/>
+          </a:effectRef>
+          <a:fontRef idx="minor">
+            <a:schemeClr val="lt1"/>
+          </a:fontRef>
+        </p:style>
+        <p:txBody>
+          <a:bodyPr rtlCol="0" anchor="ctr"/>
+          <a:lstStyle/>
+          <a:p>
+            <a:pPr algn="ctr"/>
+            <a:endParaRPr lang="en-US"/>
+          </a:p>
+        </p:txBody>
+      </p:sp>
+      <p:sp>
+        <p:nvSpPr>
+          <p:cNvPr id="60" name="TextBox 59">
+            <a:extLst>
+              <a:ext uri="{FF2B5EF4-FFF2-40B4-BE49-F238E27FC236}">
+                <a16:creationId xmlns:a16="http://schemas.microsoft.com/office/drawing/2014/main" id="{1070B8E3-FA50-9884-08AB-5A6A749F34ED}"/>
+              </a:ext>
+            </a:extLst>
+          </p:cNvPr>
+          <p:cNvSpPr txBox="1"/>
+          <p:nvPr/>
+        </p:nvSpPr>
+        <p:spPr>
+          <a:xfrm>
+            <a:off x="33339" y="6600"/>
+            <a:ext cx="1443793" cy="369332"/>
+          </a:xfrm>
+          <a:prstGeom prst="rect">
+            <a:avLst/>
+          </a:prstGeom>
+          <a:noFill/>
+        </p:spPr>
+        <p:txBody>
+          <a:bodyPr wrap="none" rtlCol="0">
+            <a:spAutoFit/>
+          </a:bodyPr>
+          <a:lstStyle/>
+          <a:p>
+            <a:r>
+              <a:rPr lang="en-US" dirty="0">
+                <a:solidFill>
+                  <a:schemeClr val="bg1"/>
+                </a:solidFill>
+              </a:rPr>
+              <a:t>Ground level</a:t>
+            </a:r>
+          </a:p>
+        </p:txBody>
+      </p:sp>
+      <p:sp>
+        <p:nvSpPr>
+          <p:cNvPr id="61" name="TextBox 60">
+            <a:extLst>
+              <a:ext uri="{FF2B5EF4-FFF2-40B4-BE49-F238E27FC236}">
+                <a16:creationId xmlns:a16="http://schemas.microsoft.com/office/drawing/2014/main" id="{E1BC1ACA-CCB4-A792-A68A-C536E1B4EB9F}"/>
+              </a:ext>
+            </a:extLst>
+          </p:cNvPr>
+          <p:cNvSpPr txBox="1"/>
+          <p:nvPr/>
+        </p:nvSpPr>
+        <p:spPr>
+          <a:xfrm>
+            <a:off x="7184106" y="6600"/>
+            <a:ext cx="2000804" cy="369332"/>
+          </a:xfrm>
+          <a:prstGeom prst="rect">
+            <a:avLst/>
+          </a:prstGeom>
+          <a:noFill/>
+        </p:spPr>
+        <p:txBody>
+          <a:bodyPr wrap="none" rtlCol="0">
+            <a:spAutoFit/>
+          </a:bodyPr>
+          <a:lstStyle/>
+          <a:p>
+            <a:r>
+              <a:rPr lang="en-US" dirty="0">
+                <a:solidFill>
+                  <a:schemeClr val="bg1"/>
+                </a:solidFill>
+              </a:rPr>
+              <a:t>Underground level</a:t>
+            </a:r>
+          </a:p>
+        </p:txBody>
+      </p:sp>
+      <p:pic>
+        <p:nvPicPr>
+          <p:cNvPr id="70" name="Picture 69">
+            <a:extLst>
+              <a:ext uri="{FF2B5EF4-FFF2-40B4-BE49-F238E27FC236}">
+                <a16:creationId xmlns:a16="http://schemas.microsoft.com/office/drawing/2014/main" id="{602FC070-CD77-9DF8-0497-60C6EDF71713}"/>
+              </a:ext>
+            </a:extLst>
+          </p:cNvPr>
+          <p:cNvPicPr>
+            <a:picLocks noChangeAspect="1"/>
+          </p:cNvPicPr>
+          <p:nvPr/>
+        </p:nvPicPr>
+        <p:blipFill>
+          <a:blip r:embed="rId4"/>
+          <a:stretch>
+            <a:fillRect/>
+          </a:stretch>
+        </p:blipFill>
+        <p:spPr>
+          <a:xfrm>
+            <a:off x="1927088" y="1134669"/>
+            <a:ext cx="1530596" cy="746959"/>
+          </a:xfrm>
+          <a:prstGeom prst="rect">
+            <a:avLst/>
+          </a:prstGeom>
+        </p:spPr>
+      </p:pic>
+      <p:sp>
+        <p:nvSpPr>
+          <p:cNvPr id="71" name="TextBox 70">
+            <a:extLst>
+              <a:ext uri="{FF2B5EF4-FFF2-40B4-BE49-F238E27FC236}">
+                <a16:creationId xmlns:a16="http://schemas.microsoft.com/office/drawing/2014/main" id="{D7981855-66DC-26A9-3927-F9BD53AE1C8A}"/>
+              </a:ext>
+            </a:extLst>
+          </p:cNvPr>
+          <p:cNvSpPr txBox="1"/>
+          <p:nvPr/>
+        </p:nvSpPr>
+        <p:spPr>
+          <a:xfrm>
+            <a:off x="5004725" y="1439671"/>
+            <a:ext cx="1643309" cy="646331"/>
+          </a:xfrm>
+          <a:prstGeom prst="rect">
+            <a:avLst/>
+          </a:prstGeom>
+          <a:noFill/>
+        </p:spPr>
+        <p:txBody>
+          <a:bodyPr wrap="square" rtlCol="0">
+            <a:spAutoFit/>
+          </a:bodyPr>
+          <a:lstStyle/>
+          <a:p>
+            <a:r>
+              <a:rPr lang="en-US" sz="1200" dirty="0"/>
+              <a:t>3. Core area has to fit here. I think it is about 12 x 6</a:t>
+            </a:r>
+          </a:p>
+        </p:txBody>
+      </p:sp>
+      <p:cxnSp>
+        <p:nvCxnSpPr>
+          <p:cNvPr id="72" name="Straight Arrow Connector 71">
+            <a:extLst>
+              <a:ext uri="{FF2B5EF4-FFF2-40B4-BE49-F238E27FC236}">
+                <a16:creationId xmlns:a16="http://schemas.microsoft.com/office/drawing/2014/main" id="{41BA23C1-C942-EC33-1B2A-3258C440EC51}"/>
+              </a:ext>
+            </a:extLst>
+          </p:cNvPr>
+          <p:cNvCxnSpPr>
+            <a:cxnSpLocks/>
+          </p:cNvCxnSpPr>
+          <p:nvPr/>
+        </p:nvCxnSpPr>
+        <p:spPr>
+          <a:xfrm flipH="1" flipV="1">
+            <a:off x="3166533" y="1609163"/>
+            <a:ext cx="1879920" cy="31177"/>
+          </a:xfrm>
+          <a:prstGeom prst="straightConnector1">
+            <a:avLst/>
+          </a:prstGeom>
+          <a:ln>
+            <a:solidFill>
+              <a:srgbClr val="FF0000"/>
+            </a:solidFill>
+            <a:tailEnd type="triangle"/>
+          </a:ln>
+        </p:spPr>
+        <p:style>
+          <a:lnRef idx="2">
+            <a:schemeClr val="accent1"/>
+          </a:lnRef>
+          <a:fillRef idx="0">
+            <a:schemeClr val="accent1"/>
+          </a:fillRef>
+          <a:effectRef idx="1">
+            <a:schemeClr val="accent1"/>
+          </a:effectRef>
+          <a:fontRef idx="minor">
+            <a:schemeClr val="tx1"/>
+          </a:fontRef>
+        </p:style>
+      </p:cxnSp>
+      <p:sp>
+        <p:nvSpPr>
+          <p:cNvPr id="75" name="TextBox 74">
+            <a:extLst>
+              <a:ext uri="{FF2B5EF4-FFF2-40B4-BE49-F238E27FC236}">
+                <a16:creationId xmlns:a16="http://schemas.microsoft.com/office/drawing/2014/main" id="{BD491276-CDB2-906F-92DE-2D14000230EC}"/>
+              </a:ext>
+            </a:extLst>
+          </p:cNvPr>
+          <p:cNvSpPr txBox="1"/>
+          <p:nvPr/>
+        </p:nvSpPr>
+        <p:spPr>
+          <a:xfrm>
+            <a:off x="5113554" y="2466697"/>
+            <a:ext cx="1643309" cy="646331"/>
+          </a:xfrm>
+          <a:prstGeom prst="rect">
+            <a:avLst/>
+          </a:prstGeom>
+          <a:noFill/>
+        </p:spPr>
+        <p:txBody>
+          <a:bodyPr wrap="square" rtlCol="0">
+            <a:spAutoFit/>
+          </a:bodyPr>
+          <a:lstStyle/>
+          <a:p>
+            <a:r>
+              <a:rPr lang="en-US" sz="1200" dirty="0"/>
+              <a:t>4. Pool has to be turned a bit, so it is on the flat area</a:t>
+            </a:r>
+          </a:p>
+        </p:txBody>
+      </p:sp>
+      <p:cxnSp>
+        <p:nvCxnSpPr>
+          <p:cNvPr id="76" name="Straight Arrow Connector 75">
+            <a:extLst>
+              <a:ext uri="{FF2B5EF4-FFF2-40B4-BE49-F238E27FC236}">
+                <a16:creationId xmlns:a16="http://schemas.microsoft.com/office/drawing/2014/main" id="{1ED06EE8-9EB3-914E-8F30-48BAF88698B7}"/>
+              </a:ext>
+            </a:extLst>
+          </p:cNvPr>
+          <p:cNvCxnSpPr>
+            <a:cxnSpLocks/>
+          </p:cNvCxnSpPr>
+          <p:nvPr/>
+        </p:nvCxnSpPr>
+        <p:spPr>
+          <a:xfrm flipH="1">
+            <a:off x="3457684" y="2687332"/>
+            <a:ext cx="1765300" cy="902535"/>
+          </a:xfrm>
+          <a:prstGeom prst="straightConnector1">
+            <a:avLst/>
+          </a:prstGeom>
+          <a:ln>
+            <a:solidFill>
+              <a:srgbClr val="FF0000"/>
+            </a:solidFill>
+            <a:tailEnd type="triangle"/>
+          </a:ln>
+        </p:spPr>
+        <p:style>
+          <a:lnRef idx="2">
+            <a:schemeClr val="accent1"/>
+          </a:lnRef>
+          <a:fillRef idx="0">
+            <a:schemeClr val="accent1"/>
+          </a:fillRef>
+          <a:effectRef idx="1">
+            <a:schemeClr val="accent1"/>
+          </a:effectRef>
+          <a:fontRef idx="minor">
+            <a:schemeClr val="tx1"/>
+          </a:fontRef>
+        </p:style>
+      </p:cxnSp>
+      <p:sp>
+        <p:nvSpPr>
+          <p:cNvPr id="77" name="TextBox 76">
+            <a:extLst>
+              <a:ext uri="{FF2B5EF4-FFF2-40B4-BE49-F238E27FC236}">
+                <a16:creationId xmlns:a16="http://schemas.microsoft.com/office/drawing/2014/main" id="{B296C974-EAB6-4B23-9D47-B319DE8ECCC7}"/>
+              </a:ext>
+            </a:extLst>
+          </p:cNvPr>
+          <p:cNvSpPr txBox="1"/>
+          <p:nvPr/>
+        </p:nvSpPr>
+        <p:spPr>
+          <a:xfrm>
+            <a:off x="4928237" y="3531313"/>
+            <a:ext cx="1643309" cy="276999"/>
+          </a:xfrm>
+          <a:prstGeom prst="rect">
+            <a:avLst/>
+          </a:prstGeom>
+          <a:noFill/>
+        </p:spPr>
+        <p:txBody>
+          <a:bodyPr wrap="square" rtlCol="0">
+            <a:spAutoFit/>
+          </a:bodyPr>
+          <a:lstStyle/>
+          <a:p>
+            <a:r>
+              <a:rPr lang="en-US" sz="1200" dirty="0"/>
+              <a:t>5. BBQ area 5x5 about</a:t>
+            </a:r>
+          </a:p>
+        </p:txBody>
+      </p:sp>
+      <p:cxnSp>
+        <p:nvCxnSpPr>
+          <p:cNvPr id="78" name="Straight Arrow Connector 77">
+            <a:extLst>
+              <a:ext uri="{FF2B5EF4-FFF2-40B4-BE49-F238E27FC236}">
+                <a16:creationId xmlns:a16="http://schemas.microsoft.com/office/drawing/2014/main" id="{5CEC107F-82A5-0715-2F05-A909746E7819}"/>
+              </a:ext>
+            </a:extLst>
+          </p:cNvPr>
+          <p:cNvCxnSpPr>
+            <a:cxnSpLocks/>
+          </p:cNvCxnSpPr>
+          <p:nvPr/>
+        </p:nvCxnSpPr>
+        <p:spPr>
+          <a:xfrm flipH="1">
+            <a:off x="3272367" y="3751948"/>
+            <a:ext cx="1765300" cy="902535"/>
+          </a:xfrm>
+          <a:prstGeom prst="straightConnector1">
+            <a:avLst/>
+          </a:prstGeom>
+          <a:ln>
+            <a:solidFill>
+              <a:srgbClr val="FF0000"/>
+            </a:solidFill>
+            <a:tailEnd type="triangle"/>
+          </a:ln>
+        </p:spPr>
+        <p:style>
+          <a:lnRef idx="2">
+            <a:schemeClr val="accent1"/>
+          </a:lnRef>
+          <a:fillRef idx="0">
+            <a:schemeClr val="accent1"/>
+          </a:fillRef>
+          <a:effectRef idx="1">
+            <a:schemeClr val="accent1"/>
+          </a:effectRef>
+          <a:fontRef idx="minor">
+            <a:schemeClr val="tx1"/>
+          </a:fontRef>
+        </p:style>
+      </p:cxnSp>
+      <p:sp>
+        <p:nvSpPr>
+          <p:cNvPr id="79" name="TextBox 78">
+            <a:extLst>
+              <a:ext uri="{FF2B5EF4-FFF2-40B4-BE49-F238E27FC236}">
+                <a16:creationId xmlns:a16="http://schemas.microsoft.com/office/drawing/2014/main" id="{A4C6BBAB-FDF3-5A5C-8BBD-5E5A091898EF}"/>
+              </a:ext>
+            </a:extLst>
+          </p:cNvPr>
+          <p:cNvSpPr txBox="1"/>
+          <p:nvPr/>
+        </p:nvSpPr>
+        <p:spPr>
+          <a:xfrm>
+            <a:off x="4947091" y="83693"/>
+            <a:ext cx="1643309" cy="276999"/>
+          </a:xfrm>
+          <a:prstGeom prst="rect">
+            <a:avLst/>
+          </a:prstGeom>
+          <a:noFill/>
+        </p:spPr>
+        <p:txBody>
+          <a:bodyPr wrap="square" rtlCol="0">
+            <a:spAutoFit/>
+          </a:bodyPr>
+          <a:lstStyle/>
+          <a:p>
+            <a:r>
+              <a:rPr lang="en-US" sz="1200" dirty="0"/>
+              <a:t>1.Lookout some2.5 x6</a:t>
+            </a:r>
+          </a:p>
+        </p:txBody>
+      </p:sp>
+      <p:cxnSp>
+        <p:nvCxnSpPr>
+          <p:cNvPr id="80" name="Straight Arrow Connector 79">
+            <a:extLst>
+              <a:ext uri="{FF2B5EF4-FFF2-40B4-BE49-F238E27FC236}">
+                <a16:creationId xmlns:a16="http://schemas.microsoft.com/office/drawing/2014/main" id="{16923419-F644-E375-E10A-3097658A6A20}"/>
+              </a:ext>
+            </a:extLst>
+          </p:cNvPr>
+          <p:cNvCxnSpPr>
+            <a:cxnSpLocks/>
+            <a:stCxn id="79" idx="1"/>
+          </p:cNvCxnSpPr>
+          <p:nvPr/>
+        </p:nvCxnSpPr>
+        <p:spPr>
+          <a:xfrm flipH="1">
+            <a:off x="2777067" y="222193"/>
+            <a:ext cx="2170024" cy="708109"/>
+          </a:xfrm>
+          <a:prstGeom prst="straightConnector1">
+            <a:avLst/>
+          </a:prstGeom>
+          <a:ln>
+            <a:solidFill>
+              <a:srgbClr val="FF0000"/>
+            </a:solidFill>
+            <a:tailEnd type="triangle"/>
+          </a:ln>
+        </p:spPr>
+        <p:style>
+          <a:lnRef idx="2">
+            <a:schemeClr val="accent1"/>
+          </a:lnRef>
+          <a:fillRef idx="0">
+            <a:schemeClr val="accent1"/>
+          </a:fillRef>
+          <a:effectRef idx="1">
+            <a:schemeClr val="accent1"/>
+          </a:effectRef>
+          <a:fontRef idx="minor">
+            <a:schemeClr val="tx1"/>
+          </a:fontRef>
+        </p:style>
+      </p:cxnSp>
+      <p:sp>
+        <p:nvSpPr>
+          <p:cNvPr id="84" name="TextBox 83">
+            <a:extLst>
+              <a:ext uri="{FF2B5EF4-FFF2-40B4-BE49-F238E27FC236}">
+                <a16:creationId xmlns:a16="http://schemas.microsoft.com/office/drawing/2014/main" id="{8AD70081-A836-5B06-2720-8D3D76EC7CAA}"/>
+              </a:ext>
+            </a:extLst>
+          </p:cNvPr>
+          <p:cNvSpPr txBox="1"/>
+          <p:nvPr/>
+        </p:nvSpPr>
+        <p:spPr>
+          <a:xfrm>
+            <a:off x="5396731" y="469695"/>
+            <a:ext cx="1643309" cy="830997"/>
+          </a:xfrm>
+          <a:prstGeom prst="rect">
+            <a:avLst/>
+          </a:prstGeom>
+          <a:noFill/>
+        </p:spPr>
+        <p:txBody>
+          <a:bodyPr wrap="square" rtlCol="0">
+            <a:spAutoFit/>
+          </a:bodyPr>
+          <a:lstStyle/>
+          <a:p>
+            <a:r>
+              <a:rPr lang="en-US" sz="1200" dirty="0"/>
+              <a:t>2. One room has to be eliminated from here. Leave only a bedroom and a living room</a:t>
+            </a:r>
+          </a:p>
+        </p:txBody>
+      </p:sp>
+      <p:cxnSp>
+        <p:nvCxnSpPr>
+          <p:cNvPr id="85" name="Straight Arrow Connector 84">
+            <a:extLst>
+              <a:ext uri="{FF2B5EF4-FFF2-40B4-BE49-F238E27FC236}">
+                <a16:creationId xmlns:a16="http://schemas.microsoft.com/office/drawing/2014/main" id="{E6491334-27F8-73DA-EC59-AB0B2D6FF256}"/>
+              </a:ext>
+            </a:extLst>
+          </p:cNvPr>
+          <p:cNvCxnSpPr>
+            <a:cxnSpLocks/>
+          </p:cNvCxnSpPr>
+          <p:nvPr/>
+        </p:nvCxnSpPr>
+        <p:spPr>
+          <a:xfrm>
+            <a:off x="7080013" y="657467"/>
+            <a:ext cx="3516020" cy="1070179"/>
+          </a:xfrm>
+          <a:prstGeom prst="straightConnector1">
+            <a:avLst/>
+          </a:prstGeom>
+          <a:ln>
+            <a:solidFill>
+              <a:srgbClr val="FF0000"/>
+            </a:solidFill>
+            <a:tailEnd type="triangle"/>
+          </a:ln>
+        </p:spPr>
+        <p:style>
+          <a:lnRef idx="2">
+            <a:schemeClr val="accent1"/>
+          </a:lnRef>
+          <a:fillRef idx="0">
+            <a:schemeClr val="accent1"/>
+          </a:fillRef>
+          <a:effectRef idx="1">
+            <a:schemeClr val="accent1"/>
+          </a:effectRef>
+          <a:fontRef idx="minor">
+            <a:schemeClr val="tx1"/>
+          </a:fontRef>
+        </p:style>
+      </p:cxnSp>
+      <p:sp>
+        <p:nvSpPr>
+          <p:cNvPr id="87" name="TextBox 86">
+            <a:extLst>
+              <a:ext uri="{FF2B5EF4-FFF2-40B4-BE49-F238E27FC236}">
+                <a16:creationId xmlns:a16="http://schemas.microsoft.com/office/drawing/2014/main" id="{039273A1-21E7-F021-AB40-4ECA88C7811D}"/>
+              </a:ext>
+            </a:extLst>
+          </p:cNvPr>
+          <p:cNvSpPr txBox="1"/>
+          <p:nvPr/>
+        </p:nvSpPr>
+        <p:spPr>
+          <a:xfrm>
+            <a:off x="5435442" y="4513793"/>
+            <a:ext cx="1643309" cy="830997"/>
+          </a:xfrm>
+          <a:prstGeom prst="rect">
+            <a:avLst/>
+          </a:prstGeom>
+          <a:noFill/>
+        </p:spPr>
+        <p:txBody>
+          <a:bodyPr wrap="square" rtlCol="0">
+            <a:spAutoFit/>
+          </a:bodyPr>
+          <a:lstStyle/>
+          <a:p>
+            <a:r>
+              <a:rPr lang="en-US" sz="1200" dirty="0"/>
+              <a:t>6. We need to move bedrooms to this side (each room should be about 4m x 7m)</a:t>
+            </a:r>
+          </a:p>
+        </p:txBody>
+      </p:sp>
+      <p:cxnSp>
+        <p:nvCxnSpPr>
+          <p:cNvPr id="88" name="Straight Arrow Connector 87">
+            <a:extLst>
+              <a:ext uri="{FF2B5EF4-FFF2-40B4-BE49-F238E27FC236}">
+                <a16:creationId xmlns:a16="http://schemas.microsoft.com/office/drawing/2014/main" id="{AA114B19-D729-125E-E3E7-092138727DA3}"/>
+              </a:ext>
+            </a:extLst>
+          </p:cNvPr>
+          <p:cNvCxnSpPr>
+            <a:cxnSpLocks/>
+          </p:cNvCxnSpPr>
+          <p:nvPr/>
+        </p:nvCxnSpPr>
+        <p:spPr>
+          <a:xfrm>
+            <a:off x="6988284" y="4652293"/>
+            <a:ext cx="4234283" cy="990740"/>
+          </a:xfrm>
+          <a:prstGeom prst="straightConnector1">
+            <a:avLst/>
+          </a:prstGeom>
+          <a:ln>
+            <a:solidFill>
+              <a:srgbClr val="FF0000"/>
+            </a:solidFill>
+            <a:tailEnd type="triangle"/>
+          </a:ln>
+        </p:spPr>
+        <p:style>
+          <a:lnRef idx="2">
+            <a:schemeClr val="accent1"/>
+          </a:lnRef>
+          <a:fillRef idx="0">
+            <a:schemeClr val="accent1"/>
+          </a:fillRef>
+          <a:effectRef idx="1">
+            <a:schemeClr val="accent1"/>
+          </a:effectRef>
+          <a:fontRef idx="minor">
+            <a:schemeClr val="tx1"/>
+          </a:fontRef>
+        </p:style>
+      </p:cxnSp>
+      <p:cxnSp>
+        <p:nvCxnSpPr>
+          <p:cNvPr id="90" name="Straight Arrow Connector 89">
+            <a:extLst>
+              <a:ext uri="{FF2B5EF4-FFF2-40B4-BE49-F238E27FC236}">
+                <a16:creationId xmlns:a16="http://schemas.microsoft.com/office/drawing/2014/main" id="{3467B801-6FFF-B585-8D9D-EC66A459424A}"/>
+              </a:ext>
+            </a:extLst>
+          </p:cNvPr>
+          <p:cNvCxnSpPr>
+            <a:cxnSpLocks/>
+          </p:cNvCxnSpPr>
+          <p:nvPr/>
+        </p:nvCxnSpPr>
+        <p:spPr>
+          <a:xfrm>
+            <a:off x="6969018" y="4652293"/>
+            <a:ext cx="2805749" cy="990740"/>
+          </a:xfrm>
+          <a:prstGeom prst="straightConnector1">
+            <a:avLst/>
+          </a:prstGeom>
+          <a:ln>
+            <a:solidFill>
+              <a:srgbClr val="FF0000"/>
+            </a:solidFill>
+            <a:tailEnd type="triangle"/>
+          </a:ln>
+        </p:spPr>
+        <p:style>
+          <a:lnRef idx="2">
+            <a:schemeClr val="accent1"/>
+          </a:lnRef>
+          <a:fillRef idx="0">
+            <a:schemeClr val="accent1"/>
+          </a:fillRef>
+          <a:effectRef idx="1">
+            <a:schemeClr val="accent1"/>
+          </a:effectRef>
+          <a:fontRef idx="minor">
+            <a:schemeClr val="tx1"/>
+          </a:fontRef>
+        </p:style>
+      </p:cxnSp>
+      <p:cxnSp>
+        <p:nvCxnSpPr>
+          <p:cNvPr id="94" name="Straight Arrow Connector 93">
+            <a:extLst>
+              <a:ext uri="{FF2B5EF4-FFF2-40B4-BE49-F238E27FC236}">
+                <a16:creationId xmlns:a16="http://schemas.microsoft.com/office/drawing/2014/main" id="{08BD35E3-DE48-F5B8-BDCE-C4FD8369326D}"/>
+              </a:ext>
+            </a:extLst>
+          </p:cNvPr>
+          <p:cNvCxnSpPr>
+            <a:cxnSpLocks/>
+          </p:cNvCxnSpPr>
+          <p:nvPr/>
+        </p:nvCxnSpPr>
+        <p:spPr>
+          <a:xfrm>
+            <a:off x="6969018" y="4652293"/>
+            <a:ext cx="4160415" cy="59407"/>
+          </a:xfrm>
+          <a:prstGeom prst="straightConnector1">
+            <a:avLst/>
+          </a:prstGeom>
+          <a:ln>
+            <a:solidFill>
+              <a:srgbClr val="FF0000"/>
+            </a:solidFill>
+            <a:tailEnd type="triangle"/>
+          </a:ln>
+        </p:spPr>
+        <p:style>
+          <a:lnRef idx="2">
+            <a:schemeClr val="accent1"/>
+          </a:lnRef>
+          <a:fillRef idx="0">
+            <a:schemeClr val="accent1"/>
+          </a:fillRef>
+          <a:effectRef idx="1">
+            <a:schemeClr val="accent1"/>
+          </a:effectRef>
+          <a:fontRef idx="minor">
+            <a:schemeClr val="tx1"/>
+          </a:fontRef>
+        </p:style>
+      </p:cxnSp>
+    </p:spTree>
+    <p:extLst>
+      <p:ext uri="{BB962C8B-B14F-4D97-AF65-F5344CB8AC3E}">
+        <p14:creationId xmlns:p14="http://schemas.microsoft.com/office/powerpoint/2010/main" val="3529002491"/>
       </p:ext>
     </p:extLst>
   </p:cSld>
